--- a/docs/free-rwe-resources/train-the-trainer/training/day-05-treatment-pathways/kit/Recording-Script.pptx
+++ b/docs/free-rwe-resources/train-the-trainer/training/day-05-treatment-pathways/kit/Recording-Script.pptx
@@ -21,7 +21,7 @@
     <p:sldId id="269" r:id="rId20"/>
     <p:sldId id="270" r:id="rId21"/>
   </p:sldIdLst>
-  <p:sldSz cx="9144000" cy="6858000" type="screen4x3"/>
+  <p:sldSz cx="12192000" cy="6858000" type="screen4x3"/>
   <p:notesSz cx="6858000" cy="9144000"/>
   <p:defaultTextStyle>
     <a:defPPr>
@@ -150,8 +150,8 @@
         </p:nvSpPr>
         <p:spPr>
           <a:xfrm>
-            <a:off x="685800" y="2130425"/>
-            <a:ext cx="7772400" cy="1470025"/>
+            <a:off x="914400" y="2130425"/>
+            <a:ext cx="10363200" cy="1470025"/>
           </a:xfrm>
         </p:spPr>
         <p:txBody>
@@ -178,14 +178,14 @@
         </p:nvSpPr>
         <p:spPr>
           <a:xfrm>
-            <a:off x="1371600" y="3886200"/>
-            <a:ext cx="6400800" cy="1752600"/>
+            <a:off x="1828800" y="3886200"/>
+            <a:ext cx="8534400" cy="1752600"/>
           </a:xfrm>
         </p:spPr>
         <p:txBody>
           <a:bodyPr/>
           <a:lstStyle>
-            <a:lvl1pPr marL="0" indent="0" algn="ctr">
+            <a:lvl1pPr marL="0" indent="0" algn="l">
               <a:buNone/>
               <a:defRPr>
                 <a:solidFill>
@@ -562,8 +562,8 @@
         </p:nvSpPr>
         <p:spPr>
           <a:xfrm>
-            <a:off x="6629400" y="274638"/>
-            <a:ext cx="2057400" cy="5851525"/>
+            <a:off x="8839200" y="274638"/>
+            <a:ext cx="2743200" cy="5851525"/>
           </a:xfrm>
         </p:spPr>
         <p:txBody>
@@ -590,8 +590,8 @@
         </p:nvSpPr>
         <p:spPr>
           <a:xfrm>
-            <a:off x="457200" y="274638"/>
-            <a:ext cx="6019800" cy="5851525"/>
+            <a:off x="609600" y="274638"/>
+            <a:ext cx="8026400" cy="5851525"/>
           </a:xfrm>
         </p:spPr>
         <p:txBody>
@@ -912,46 +912,46 @@
         </p:nvSpPr>
         <p:spPr>
           <a:xfrm>
-            <a:off x="722313" y="4406900"/>
-            <a:ext cx="7772400" cy="1362075"/>
+            <a:off x="963084" y="1920240"/>
+            <a:ext cx="10363200" cy="1280160"/>
           </a:xfrm>
         </p:spPr>
         <p:txBody>
+          <a:bodyPr anchor="b"/>
+          <a:lstStyle>
+            <a:lvl1pPr algn="l">
+              <a:defRPr sz="4000" b="1"/>
+            </a:lvl1pPr>
+          </a:lstStyle>
+          <a:p>
+            <a:r>
+              <a:rPr lang="en-US" smtClean="0"/>
+              <a:t>Click to edit Master title style</a:t>
+            </a:r>
+            <a:endParaRPr lang="en-US"/>
+          </a:p>
+        </p:txBody>
+      </p:sp>
+      <p:sp>
+        <p:nvSpPr>
+          <p:cNvPr id="3" name="Text Placeholder 2"/>
+          <p:cNvSpPr>
+            <a:spLocks noGrp="1"/>
+          </p:cNvSpPr>
+          <p:nvPr>
+            <p:ph type="body" idx="1"/>
+          </p:nvPr>
+        </p:nvSpPr>
+        <p:spPr>
+          <a:xfrm>
+            <a:off x="963084" y="3291840"/>
+            <a:ext cx="10363200" cy="1828800"/>
+          </a:xfrm>
+        </p:spPr>
+        <p:txBody>
           <a:bodyPr anchor="t"/>
           <a:lstStyle>
-            <a:lvl1pPr algn="l">
-              <a:defRPr sz="4000" b="1" cap="all"/>
-            </a:lvl1pPr>
-          </a:lstStyle>
-          <a:p>
-            <a:r>
-              <a:rPr lang="en-US" smtClean="0"/>
-              <a:t>Click to edit Master title style</a:t>
-            </a:r>
-            <a:endParaRPr lang="en-US"/>
-          </a:p>
-        </p:txBody>
-      </p:sp>
-      <p:sp>
-        <p:nvSpPr>
-          <p:cNvPr id="3" name="Text Placeholder 2"/>
-          <p:cNvSpPr>
-            <a:spLocks noGrp="1"/>
-          </p:cNvSpPr>
-          <p:nvPr>
-            <p:ph type="body" idx="1"/>
-          </p:nvPr>
-        </p:nvSpPr>
-        <p:spPr>
-          <a:xfrm>
-            <a:off x="722313" y="2906713"/>
-            <a:ext cx="7772400" cy="1500187"/>
-          </a:xfrm>
-        </p:spPr>
-        <p:txBody>
-          <a:bodyPr anchor="b"/>
-          <a:lstStyle>
-            <a:lvl1pPr marL="0" indent="0">
+            <a:lvl1pPr marL="0" indent="0" algn="l">
               <a:buNone/>
               <a:defRPr sz="2000">
                 <a:solidFill>
@@ -1043,7 +1043,7 @@
             </a:lvl9pPr>
           </a:lstStyle>
           <a:p>
-            <a:pPr lvl="0"/>
+            <a:pPr lvl="0" algn="l"/>
             <a:r>
               <a:rPr lang="en-US" smtClean="0"/>
               <a:t>Click to edit Master text styles</a:t>
@@ -1181,8 +1181,8 @@
         </p:nvSpPr>
         <p:spPr>
           <a:xfrm>
-            <a:off x="457200" y="1600200"/>
-            <a:ext cx="4038600" cy="4525963"/>
+            <a:off x="609600" y="1600200"/>
+            <a:ext cx="5384800" cy="4525963"/>
           </a:xfrm>
         </p:spPr>
         <p:txBody>
@@ -1266,8 +1266,8 @@
         </p:nvSpPr>
         <p:spPr>
           <a:xfrm>
-            <a:off x="4648200" y="1600200"/>
-            <a:ext cx="4038600" cy="4525963"/>
+            <a:off x="6197600" y="1600200"/>
+            <a:ext cx="5384800" cy="4525963"/>
           </a:xfrm>
         </p:spPr>
         <p:txBody>
@@ -1473,8 +1473,8 @@
         </p:nvSpPr>
         <p:spPr>
           <a:xfrm>
-            <a:off x="457200" y="1535113"/>
-            <a:ext cx="4040188" cy="639762"/>
+            <a:off x="609600" y="1535113"/>
+            <a:ext cx="5386917" cy="639762"/>
           </a:xfrm>
         </p:spPr>
         <p:txBody>
@@ -1538,8 +1538,8 @@
         </p:nvSpPr>
         <p:spPr>
           <a:xfrm>
-            <a:off x="457200" y="2174875"/>
-            <a:ext cx="4040188" cy="3951288"/>
+            <a:off x="609600" y="2174875"/>
+            <a:ext cx="5386917" cy="3951288"/>
           </a:xfrm>
         </p:spPr>
         <p:txBody>
@@ -1623,8 +1623,8 @@
         </p:nvSpPr>
         <p:spPr>
           <a:xfrm>
-            <a:off x="4645025" y="1535113"/>
-            <a:ext cx="4041775" cy="639762"/>
+            <a:off x="6193366" y="1535113"/>
+            <a:ext cx="5389033" cy="639762"/>
           </a:xfrm>
         </p:spPr>
         <p:txBody>
@@ -1688,8 +1688,8 @@
         </p:nvSpPr>
         <p:spPr>
           <a:xfrm>
-            <a:off x="4645025" y="2174875"/>
-            <a:ext cx="4041775" cy="3951288"/>
+            <a:off x="6193366" y="2174875"/>
+            <a:ext cx="5389033" cy="3951288"/>
           </a:xfrm>
         </p:spPr>
         <p:txBody>
@@ -2081,8 +2081,8 @@
         </p:nvSpPr>
         <p:spPr>
           <a:xfrm>
-            <a:off x="457200" y="273050"/>
-            <a:ext cx="3008313" cy="1162050"/>
+            <a:off x="609600" y="273050"/>
+            <a:ext cx="4011084" cy="1162050"/>
           </a:xfrm>
         </p:spPr>
         <p:txBody>
@@ -2113,8 +2113,8 @@
         </p:nvSpPr>
         <p:spPr>
           <a:xfrm>
-            <a:off x="3575050" y="273050"/>
-            <a:ext cx="5111750" cy="5853113"/>
+            <a:off x="4766733" y="273050"/>
+            <a:ext cx="6815666" cy="5853113"/>
           </a:xfrm>
         </p:spPr>
         <p:txBody>
@@ -2198,8 +2198,8 @@
         </p:nvSpPr>
         <p:spPr>
           <a:xfrm>
-            <a:off x="457200" y="1435100"/>
-            <a:ext cx="3008313" cy="4691063"/>
+            <a:off x="609600" y="1435100"/>
+            <a:ext cx="4011084" cy="4691063"/>
           </a:xfrm>
         </p:spPr>
         <p:txBody>
@@ -2358,8 +2358,8 @@
         </p:nvSpPr>
         <p:spPr>
           <a:xfrm>
-            <a:off x="1792288" y="4800600"/>
-            <a:ext cx="5486400" cy="566738"/>
+            <a:off x="2389717" y="4800600"/>
+            <a:ext cx="7315200" cy="566738"/>
           </a:xfrm>
         </p:spPr>
         <p:txBody>
@@ -2390,8 +2390,8 @@
         </p:nvSpPr>
         <p:spPr>
           <a:xfrm>
-            <a:off x="1792288" y="612775"/>
-            <a:ext cx="5486400" cy="4114800"/>
+            <a:off x="2389717" y="612775"/>
+            <a:ext cx="7315200" cy="4114800"/>
           </a:xfrm>
         </p:spPr>
         <p:txBody>
@@ -2451,8 +2451,8 @@
         </p:nvSpPr>
         <p:spPr>
           <a:xfrm>
-            <a:off x="1792288" y="5367338"/>
-            <a:ext cx="5486400" cy="804862"/>
+            <a:off x="2389717" y="5367338"/>
+            <a:ext cx="7315200" cy="804862"/>
           </a:xfrm>
         </p:spPr>
         <p:txBody>
@@ -2616,8 +2616,8 @@
         </p:nvSpPr>
         <p:spPr>
           <a:xfrm>
-            <a:off x="457200" y="274638"/>
-            <a:ext cx="8229600" cy="1143000"/>
+            <a:off x="609600" y="274638"/>
+            <a:ext cx="10972800" cy="1143000"/>
           </a:xfrm>
           <a:prstGeom prst="rect">
             <a:avLst/>
@@ -2649,8 +2649,8 @@
         </p:nvSpPr>
         <p:spPr>
           <a:xfrm>
-            <a:off x="457200" y="1600200"/>
-            <a:ext cx="8229600" cy="4525963"/>
+            <a:off x="609600" y="1600200"/>
+            <a:ext cx="10972800" cy="4525963"/>
           </a:xfrm>
           <a:prstGeom prst="rect">
             <a:avLst/>
@@ -2711,8 +2711,8 @@
         </p:nvSpPr>
         <p:spPr>
           <a:xfrm>
-            <a:off x="457200" y="6356350"/>
-            <a:ext cx="2133600" cy="365125"/>
+            <a:off x="609600" y="6356350"/>
+            <a:ext cx="2844800" cy="365125"/>
           </a:xfrm>
           <a:prstGeom prst="rect">
             <a:avLst/>
@@ -2752,8 +2752,8 @@
         </p:nvSpPr>
         <p:spPr>
           <a:xfrm>
-            <a:off x="3124200" y="6356350"/>
-            <a:ext cx="2895600" cy="365125"/>
+            <a:off x="4165600" y="6356350"/>
+            <a:ext cx="3860800" cy="365125"/>
           </a:xfrm>
           <a:prstGeom prst="rect">
             <a:avLst/>
@@ -2789,8 +2789,8 @@
         </p:nvSpPr>
         <p:spPr>
           <a:xfrm>
-            <a:off x="6553200" y="6356350"/>
-            <a:ext cx="2133600" cy="365125"/>
+            <a:off x="8737600" y="6356350"/>
+            <a:ext cx="2844800" cy="365125"/>
           </a:xfrm>
           <a:prstGeom prst="rect">
             <a:avLst/>
@@ -2818,30 +2818,6 @@
           </a:p>
         </p:txBody>
       </p:sp>
-      <p:pic>
-        <p:nvPicPr>
-          <p:cNvPr id="9901" name="ALS TDI Logo"/>
-          <p:cNvPicPr>
-            <a:picLocks noChangeAspect="1"/>
-          </p:cNvPicPr>
-          <p:nvPr/>
-        </p:nvPicPr>
-        <p:blipFill>
-          <a:blip r:embed="rId13"/>
-          <a:stretch>
-            <a:fillRect/>
-          </a:stretch>
-        </p:blipFill>
-        <p:spPr>
-          <a:xfrm>
-            <a:off x="8065008" y="6043049"/>
-            <a:ext cx="914400" cy="705223"/>
-          </a:xfrm>
-          <a:prstGeom prst="rect">
-            <a:avLst/>
-          </a:prstGeom>
-        </p:spPr>
-      </p:pic>
     </p:spTree>
     <p:extLst>
       <p:ext uri="{BB962C8B-B14F-4D97-AF65-F5344CB8AC3E}">
@@ -2865,12 +2841,12 @@
   </p:sldLayoutIdLst>
   <p:txStyles>
     <p:titleStyle>
-      <a:lvl1pPr algn="ctr" defTabSz="457200" rtl="0" eaLnBrk="1" latinLnBrk="0" hangingPunct="1">
+      <a:lvl1pPr algn="l" defTabSz="457200" rtl="0" eaLnBrk="1" latinLnBrk="0" hangingPunct="1">
         <a:spcBef>
           <a:spcPct val="0"/>
         </a:spcBef>
         <a:buNone/>
-        <a:defRPr sz="4400" kern="1200">
+        <a:defRPr sz="3200" kern="1200" b="1">
           <a:solidFill>
             <a:schemeClr val="tx1"/>
           </a:solidFill>
@@ -2887,7 +2863,7 @@
         </a:spcBef>
         <a:buFont typeface="Arial"/>
         <a:buChar char="•"/>
-        <a:defRPr sz="3200" kern="1200">
+        <a:defRPr sz="2000" kern="1200">
           <a:solidFill>
             <a:schemeClr val="tx1"/>
           </a:solidFill>
@@ -2902,7 +2878,7 @@
         </a:spcBef>
         <a:buFont typeface="Arial"/>
         <a:buChar char="–"/>
-        <a:defRPr sz="2800" kern="1200">
+        <a:defRPr sz="1800" kern="1200">
           <a:solidFill>
             <a:schemeClr val="tx1"/>
           </a:solidFill>
@@ -2917,7 +2893,7 @@
         </a:spcBef>
         <a:buFont typeface="Arial"/>
         <a:buChar char="•"/>
-        <a:defRPr sz="2400" kern="1200">
+        <a:defRPr sz="1600" kern="1200">
           <a:solidFill>
             <a:schemeClr val="tx1"/>
           </a:solidFill>
@@ -2932,7 +2908,7 @@
         </a:spcBef>
         <a:buFont typeface="Arial"/>
         <a:buChar char="–"/>
-        <a:defRPr sz="2000" kern="1200">
+        <a:defRPr sz="1400" kern="1200">
           <a:solidFill>
             <a:schemeClr val="tx1"/>
           </a:solidFill>
@@ -2947,7 +2923,7 @@
         </a:spcBef>
         <a:buFont typeface="Arial"/>
         <a:buChar char="»"/>
-        <a:defRPr sz="2000" kern="1200">
+        <a:defRPr sz="1400" kern="1200">
           <a:solidFill>
             <a:schemeClr val="tx1"/>
           </a:solidFill>
@@ -3133,45 +3109,46 @@
             <a:spLocks noGrp="1"/>
           </p:cNvSpPr>
           <p:nvPr>
-            <p:ph type="title"/>
-          </p:nvPr>
-        </p:nvSpPr>
-        <p:spPr/>
-        <p:txBody>
-          <a:bodyPr/>
-          <a:lstStyle/>
-          <a:p>
-            <a:r>
-              <a:t>Recording Script</a:t>
-            </a:r>
-          </a:p>
-          <a:p>
-            <a:r>
-              <a:t>Treatment Pathway Analysis (Diabetes)</a:t>
-            </a:r>
-          </a:p>
-        </p:txBody>
-      </p:sp>
-      <p:sp>
-        <p:nvSpPr>
-          <p:cNvPr id="3" name="Content Placeholder 2"/>
-          <p:cNvSpPr>
-            <a:spLocks noGrp="1"/>
-          </p:cNvSpPr>
-          <p:nvPr>
-            <p:ph idx="1"/>
-          </p:nvPr>
-        </p:nvSpPr>
-        <p:spPr/>
-        <p:txBody>
-          <a:bodyPr/>
-          <a:lstStyle/>
-          <a:p>
+            <p:ph type="ctrTitle"/>
+          </p:nvPr>
+        </p:nvSpPr>
+        <p:spPr/>
+        <p:txBody>
+          <a:bodyPr/>
+          <a:lstStyle/>
+          <a:p>
+            <a:r>
+              <a:t>Recording Script: Treatment Pathway Analysis (Diabetes)</a:t>
+            </a:r>
+          </a:p>
+        </p:txBody>
+      </p:sp>
+      <p:sp>
+        <p:nvSpPr>
+          <p:cNvPr id="3" name="Subtitle 2"/>
+          <p:cNvSpPr>
+            <a:spLocks noGrp="1"/>
+          </p:cNvSpPr>
+          <p:nvPr>
+            <p:ph type="subTitle" idx="1"/>
+          </p:nvPr>
+        </p:nvSpPr>
+        <p:spPr/>
+        <p:txBody>
+          <a:bodyPr/>
+          <a:lstStyle/>
+          <a:p>
+            <a:pPr marL="0" indent="0">
+              <a:buNone/>
+            </a:pPr>
             <a:r>
               <a:t>Narration-Optimized Script</a:t>
             </a:r>
           </a:p>
           <a:p>
+            <a:pPr marL="0" indent="0">
+              <a:buNone/>
+            </a:pPr>
             <a:r>
               <a:t>OHDSI / OMOP</a:t>
             </a:r>
@@ -3232,7 +3209,9 @@
           <a:bodyPr/>
           <a:lstStyle/>
           <a:p>
-            <a:r>
+            <a:pPr/>
+            <a:r>
+              <a:rPr sz="2400"/>
               <a:t>Once configured, we run the analysis. Runtime varies by database size. Results will differ slightly across data sources.</a:t>
             </a:r>
           </a:p>
@@ -3292,8 +3271,10 @@
           <a:bodyPr/>
           <a:lstStyle/>
           <a:p>
-            <a:r>
-              <a:t>Arrow width represents the proportion of patients. Branching indicates variation in care. Grey segments mean no further observed treatment, not absence of care.</a:t>
+            <a:pPr/>
+            <a:r>
+              <a:rPr sz="2400"/>
+              <a:t>In the sunburst plot, each ring is the next step and the size of an arc shows the share of the target cohort on that path. The end of a pathway is shown in grey. It means no further event cohort was observed during follow-up, which is not the same as no care.</a:t>
             </a:r>
           </a:p>
         </p:txBody>
@@ -3352,8 +3333,10 @@
           <a:bodyPr/>
           <a:lstStyle/>
           <a:p>
-            <a:r>
-              <a:t>We typically see metformin dominate first-line therapy. Second-line branching reflects add-on therapies such as GLP-1 or SGLT2 inhibitors. Only a minority of patients escalate to insulin.</a:t>
+            <a:pPr/>
+            <a:r>
+              <a:rPr sz="2400"/>
+              <a:t>Published pathway work has reported metformin as the most common first diabetes drug, with wide variation between data sources. Describe what your own sunburst shows: the first-ring arcs, where the paths branch, and how many paths reach insulin.</a:t>
             </a:r>
           </a:p>
         </p:txBody>
@@ -3412,8 +3395,10 @@
           <a:bodyPr/>
           <a:lstStyle/>
           <a:p>
-            <a:r>
-              <a:t>When stratifying by age or other characteristics, differences often reflect disease severity, follow-up length, or data capture differences.</a:t>
+            <a:pPr/>
+            <a:r>
+              <a:rPr sz="2400"/>
+              <a:t>When comparing target cohorts defined by age or other characteristics, differences can reflect disease severity, follow-up length, or data capture.</a:t>
             </a:r>
           </a:p>
         </p:txBody>
@@ -3472,7 +3457,9 @@
           <a:bodyPr/>
           <a:lstStyle/>
           <a:p>
-            <a:r>
+            <a:pPr/>
+            <a:r>
+              <a:rPr sz="2400"/>
               <a:t>Treatment pathway analysis is descriptive. It does not tell us why changes occurred or whether one pathway is better than another.</a:t>
             </a:r>
           </a:p>
@@ -3532,7 +3519,9 @@
           <a:bodyPr/>
           <a:lstStyle/>
           <a:p>
-            <a:r>
+            <a:pPr/>
+            <a:r>
+              <a:rPr sz="2400"/>
               <a:t>In summary, treatment pathways provide a powerful way to visualize real-world care patterns. When interpreted carefully, they can inform hypothesis generation and study design.</a:t>
             </a:r>
           </a:p>
@@ -3592,7 +3581,9 @@
           <a:bodyPr/>
           <a:lstStyle/>
           <a:p>
-            <a:r>
+            <a:pPr/>
+            <a:r>
+              <a:rPr sz="2400"/>
               <a:t>Welcome. In this session, we will explore Treatment Pathway Analysis using the OHDSI ATLAS tool. This is an introductory, diabetes-focused walkthrough designed to show how patients move through sequences of treatments over time.</a:t>
             </a:r>
           </a:p>
@@ -3652,7 +3643,9 @@
           <a:bodyPr/>
           <a:lstStyle/>
           <a:p>
-            <a:r>
+            <a:pPr/>
+            <a:r>
+              <a:rPr sz="2400"/>
               <a:t>Treatment pathways are descriptive analyses. They help us understand real-world care patterns, not determine effectiveness or causality. Keep this framing in mind throughout the session.</a:t>
             </a:r>
           </a:p>
@@ -3712,7 +3705,9 @@
           <a:bodyPr/>
           <a:lstStyle/>
           <a:p>
-            <a:r>
+            <a:pPr/>
+            <a:r>
+              <a:rPr sz="2400"/>
               <a:t>All pathway analyses rely on the OMOP Common Data Model. Drug exposures drive treatment sequences, while cohorts define who we are studying and when observation begins.</a:t>
             </a:r>
           </a:p>
@@ -3772,8 +3767,10 @@
           <a:bodyPr/>
           <a:lstStyle/>
           <a:p>
-            <a:r>
-              <a:t>Diabetes is ideal for pathway analysis because treatment typically progresses stepwise, from metformin to additional oral agents and sometimes insulin.</a:t>
+            <a:pPr/>
+            <a:r>
+              <a:rPr sz="2400"/>
+              <a:t>Type 2 diabetes is a common teaching example for pathway analysis because several drug classes are used over time, which gives the sequences something to show.</a:t>
             </a:r>
           </a:p>
         </p:txBody>
@@ -3832,7 +3829,9 @@
           <a:bodyPr/>
           <a:lstStyle/>
           <a:p>
-            <a:r>
+            <a:pPr/>
+            <a:r>
+              <a:rPr sz="2400"/>
               <a:t>ATLAS provides a visual interface for defining cohorts, running analyses, and exploring treatment pathways. We will now walk through a complete example.</a:t>
             </a:r>
           </a:p>
@@ -3892,7 +3891,9 @@
           <a:bodyPr/>
           <a:lstStyle/>
           <a:p>
-            <a:r>
+            <a:pPr/>
+            <a:r>
+              <a:rPr sz="2400"/>
               <a:t>Here, we select a cohort of adults with Type 2 Diabetes. Cohort design choices strongly influence pathway results.</a:t>
             </a:r>
           </a:p>
@@ -3932,7 +3933,7 @@
           <a:lstStyle/>
           <a:p>
             <a:r>
-              <a:t>Selecting Treatment Ingredients (18–22 min)</a:t>
+              <a:t>Adding the Event Cohorts (18–22 min)</a:t>
             </a:r>
           </a:p>
         </p:txBody>
@@ -3952,8 +3953,10 @@
           <a:bodyPr/>
           <a:lstStyle/>
           <a:p>
-            <a:r>
-              <a:t>We use ingredient-level drug concepts such as metformin, GLP-1 receptor agonists, and insulin. Ingredient-level analysis improves interpretability across databases.</a:t>
+            <a:pPr/>
+            <a:r>
+              <a:rPr sz="2400"/>
+              <a:t>Each treatment we want to follow is its own event cohort, for example metformin, GLP-1 receptor agonists, and insulin. Building them from ingredient or class concept sets keeps the steps comparable across databases.</a:t>
             </a:r>
           </a:p>
         </p:txBody>
@@ -4012,8 +4015,10 @@
           <a:bodyPr/>
           <a:lstStyle/>
           <a:p>
-            <a:r>
-              <a:t>Key settings include the observation window, how overlapping treatments are handled, and limits on pathway complexity. These are analytic assumptions, not defaults.</a:t>
+            <a:pPr/>
+            <a:r>
+              <a:rPr sz="2400"/>
+              <a:t>The settings are the combination window, the minimum cell count, the maximum path length, and whether repeats are allowed. Follow-up time comes from the target cohort, and exposure gaps come from each event cohort's exit rule.</a:t>
             </a:r>
           </a:p>
         </p:txBody>
@@ -4029,7 +4034,7 @@
 <file path=ppt/theme/theme1.xml><?xml version="1.0" encoding="utf-8"?>
 <a:theme xmlns:a="http://schemas.openxmlformats.org/drawingml/2006/main" name="Office Theme">
   <a:themeElements>
-    <a:clrScheme name="ALS TDI">
+    <a:clrScheme name="Office">
       <a:dk1>
         <a:sysClr val="windowText" lastClr="000000"/>
       </a:dk1>
@@ -4037,39 +4042,39 @@
         <a:sysClr val="window" lastClr="FFFFFF"/>
       </a:lt1>
       <a:dk2>
-        <a:srgbClr val="6D2F77"/>
+        <a:srgbClr val="262626"/>
       </a:dk2>
       <a:lt2>
-        <a:srgbClr val="F2EAF4"/>
+        <a:srgbClr val="F2F2F2"/>
       </a:lt2>
       <a:accent1>
-        <a:srgbClr val="904199"/>
+        <a:srgbClr val="404040"/>
       </a:accent1>
       <a:accent2>
-        <a:srgbClr val="B872C0"/>
+        <a:srgbClr val="7F7F7F"/>
       </a:accent2>
       <a:accent3>
-        <a:srgbClr val="6D2F77"/>
+        <a:srgbClr val="A6A6A6"/>
       </a:accent3>
       <a:accent4>
-        <a:srgbClr val="4A4A4A"/>
+        <a:srgbClr val="595959"/>
       </a:accent4>
       <a:accent5>
-        <a:srgbClr val="D9C2DE"/>
+        <a:srgbClr val="BFBFBF"/>
       </a:accent5>
       <a:accent6>
-        <a:srgbClr val="7A3580"/>
+        <a:srgbClr val="262626"/>
       </a:accent6>
       <a:hlink>
-        <a:srgbClr val="904199"/>
+        <a:srgbClr val="000000"/>
       </a:hlink>
       <a:folHlink>
-        <a:srgbClr val="6D2F77"/>
+        <a:srgbClr val="404040"/>
       </a:folHlink>
     </a:clrScheme>
     <a:fontScheme name="Office">
       <a:majorFont>
-        <a:latin typeface="EB Garamond"/>
+        <a:latin typeface="Calibri"/>
         <a:ea typeface=""/>
         <a:cs typeface=""/>
         <a:font script="Jpan" typeface="ＭＳ Ｐゴシック"/>

--- a/docs/free-rwe-resources/train-the-trainer/training/day-05-treatment-pathways/kit/Recording-Script.pptx
+++ b/docs/free-rwe-resources/train-the-trainer/training/day-05-treatment-pathways/kit/Recording-Script.pptx
@@ -3118,7 +3118,7 @@
           <a:lstStyle/>
           <a:p>
             <a:r>
-              <a:t>Recording Script: Treatment Pathway Analysis (Diabetes)</a:t>
+              <a:t>Recording Script: Treatment Pathway Analysis (ALS Medications)</a:t>
             </a:r>
           </a:p>
         </p:txBody>
@@ -3313,7 +3313,7 @@
           <a:lstStyle/>
           <a:p>
             <a:r>
-              <a:t>Diabetes-Specific Patterns (38–43 min)</a:t>
+              <a:t>Patterns in ALS Medications (38–43 min)</a:t>
             </a:r>
           </a:p>
         </p:txBody>
@@ -3336,7 +3336,7 @@
             <a:pPr/>
             <a:r>
               <a:rPr sz="2400"/>
-              <a:t>Published pathway work has reported metformin as the most common first diabetes drug, with wide variation between data sources. Describe what your own sunburst shows: the first-ring arcs, where the paths branch, and how many paths reach insulin.</a:t>
+              <a:t>Describe what your own sunburst shows: which medication is the first step, how often a second medication follows it or is combined with it, and how many paths stop after one step. No published result is assumed for this example.</a:t>
             </a:r>
           </a:p>
         </p:txBody>
@@ -3584,7 +3584,7 @@
             <a:pPr/>
             <a:r>
               <a:rPr sz="2400"/>
-              <a:t>Welcome. In this session, we will explore Treatment Pathway Analysis using the OHDSI ATLAS tool. This is an introductory, diabetes-focused walkthrough designed to show how patients move through sequences of treatments over time.</a:t>
+              <a:t>Welcome. In this session, we will explore Treatment Pathway Analysis using the OHDSI ATLAS tool. This is an introductory walkthrough built on ALS medications, designed to show how patients move through sequences of treatments over time.</a:t>
             </a:r>
           </a:p>
         </p:txBody>
@@ -3747,7 +3747,7 @@
           <a:lstStyle/>
           <a:p>
             <a:r>
-              <a:t>Why Diabetes? (10–13 min)</a:t>
+              <a:t>Why ALS Medications? (10–13 min)</a:t>
             </a:r>
           </a:p>
         </p:txBody>
@@ -3770,7 +3770,7 @@
             <a:pPr/>
             <a:r>
               <a:rPr sz="2400"/>
-              <a:t>Type 2 diabetes is a common teaching example for pathway analysis because several drug classes are used over time, which gives the sequences something to show.</a:t>
+              <a:t>ALS has few medications, so the pathways are short and easy to read, which keeps the attention on how the sequence is built and on how each medication is captured in the data.</a:t>
             </a:r>
           </a:p>
         </p:txBody>
@@ -3894,7 +3894,7 @@
             <a:pPr/>
             <a:r>
               <a:rPr sz="2400"/>
-              <a:t>Here, we select a cohort of adults with Type 2 Diabetes. Cohort design choices strongly influence pathway results.</a:t>
+              <a:t>Here, we select a cohort of people with a motor neuron disease diagnosis. Cohort design choices strongly influence pathway results.</a:t>
             </a:r>
           </a:p>
         </p:txBody>
@@ -3956,7 +3956,7 @@
             <a:pPr/>
             <a:r>
               <a:rPr sz="2400"/>
-              <a:t>Each treatment we want to follow is its own event cohort, for example metformin, GLP-1 receptor agonists, and insulin. Building them from ingredient or class concept sets keeps the steps comparable across databases.</a:t>
+              <a:t>Each treatment we want to follow is its own event cohort, for example riluzole and edaravone. Building them from ingredient concept sets keeps the steps comparable across databases.</a:t>
             </a:r>
           </a:p>
         </p:txBody>
